--- a/bitemp_register_v06/docs/BitemporeleRegistersv01.pptx
+++ b/bitemp_register_v06/docs/BitemporeleRegistersv01.pptx
@@ -13,12 +13,14 @@
     <p:sldId id="264" r:id="rId7"/>
     <p:sldId id="259" r:id="rId8"/>
     <p:sldId id="260" r:id="rId9"/>
-    <p:sldId id="263" r:id="rId10"/>
-    <p:sldId id="265" r:id="rId11"/>
-    <p:sldId id="266" r:id="rId12"/>
-    <p:sldId id="267" r:id="rId13"/>
-    <p:sldId id="268" r:id="rId14"/>
-    <p:sldId id="269" r:id="rId15"/>
+    <p:sldId id="265" r:id="rId10"/>
+    <p:sldId id="270" r:id="rId11"/>
+    <p:sldId id="271" r:id="rId12"/>
+    <p:sldId id="263" r:id="rId13"/>
+    <p:sldId id="266" r:id="rId14"/>
+    <p:sldId id="267" r:id="rId15"/>
+    <p:sldId id="268" r:id="rId16"/>
+    <p:sldId id="269" r:id="rId17"/>
   </p:sldIdLst>
   <p:sldSz cx="12192000" cy="6858000"/>
   <p:notesSz cx="6858000" cy="9144000"/>
@@ -3412,7 +3414,7 @@
         <p:cNvPr id="1" name="">
           <a:extLst>
             <a:ext uri="{FF2B5EF4-FFF2-40B4-BE49-F238E27FC236}">
-              <a16:creationId xmlns:a16="http://schemas.microsoft.com/office/drawing/2014/main" id="{75D7C7C8-AB21-888A-3664-FB8C2EFA9D15}"/>
+              <a16:creationId xmlns:a16="http://schemas.microsoft.com/office/drawing/2014/main" id="{BEA5FB99-B86B-5E2D-D3AF-FF4810C11528}"/>
             </a:ext>
           </a:extLst>
         </p:cNvPr>
@@ -3432,7 +3434,7 @@
           <p:cNvPr id="2" name="Titel 1">
             <a:extLst>
               <a:ext uri="{FF2B5EF4-FFF2-40B4-BE49-F238E27FC236}">
-                <a16:creationId xmlns:a16="http://schemas.microsoft.com/office/drawing/2014/main" id="{C70C76CB-1605-60C6-8021-F39F2ABE920D}"/>
+                <a16:creationId xmlns:a16="http://schemas.microsoft.com/office/drawing/2014/main" id="{F7FB44F7-9EFE-95E9-60C4-F1F622DF1616}"/>
               </a:ext>
             </a:extLst>
           </p:cNvPr>
@@ -3464,7 +3466,7 @@
           <p:cNvPr id="3" name="Tijdelijke aanduiding voor inhoud 2">
             <a:extLst>
               <a:ext uri="{FF2B5EF4-FFF2-40B4-BE49-F238E27FC236}">
-                <a16:creationId xmlns:a16="http://schemas.microsoft.com/office/drawing/2014/main" id="{72FE2A8D-5171-C9A9-B882-E35E4103D3BD}"/>
+                <a16:creationId xmlns:a16="http://schemas.microsoft.com/office/drawing/2014/main" id="{00F9F801-3DBB-A865-6184-A5D5C5CE589C}"/>
               </a:ext>
             </a:extLst>
           </p:cNvPr>
@@ -3492,7 +3494,7 @@
     </p:spTree>
     <p:extLst>
       <p:ext uri="{BB962C8B-B14F-4D97-AF65-F5344CB8AC3E}">
-        <p14:creationId xmlns:p14="http://schemas.microsoft.com/office/powerpoint/2010/main" val="1991561428"/>
+        <p14:creationId xmlns:p14="http://schemas.microsoft.com/office/powerpoint/2010/main" val="1943080841"/>
       </p:ext>
     </p:extLst>
   </p:cSld>
@@ -3503,6 +3505,205 @@
 </file>
 
 <file path=ppt/slides/slide11.xml><?xml version="1.0" encoding="utf-8"?>
+<p:sld xmlns:a="http://schemas.openxmlformats.org/drawingml/2006/main" xmlns:r="http://schemas.openxmlformats.org/officeDocument/2006/relationships" xmlns:p="http://schemas.openxmlformats.org/presentationml/2006/main">
+  <p:cSld>
+    <p:spTree>
+      <p:nvGrpSpPr>
+        <p:cNvPr id="1" name="">
+          <a:extLst>
+            <a:ext uri="{FF2B5EF4-FFF2-40B4-BE49-F238E27FC236}">
+              <a16:creationId xmlns:a16="http://schemas.microsoft.com/office/drawing/2014/main" id="{84A369BF-AAD0-131C-557C-8B5E114439A6}"/>
+            </a:ext>
+          </a:extLst>
+        </p:cNvPr>
+        <p:cNvGrpSpPr/>
+        <p:nvPr/>
+      </p:nvGrpSpPr>
+      <p:grpSpPr>
+        <a:xfrm>
+          <a:off x="0" y="0"/>
+          <a:ext cx="0" cy="0"/>
+          <a:chOff x="0" y="0"/>
+          <a:chExt cx="0" cy="0"/>
+        </a:xfrm>
+      </p:grpSpPr>
+      <p:sp>
+        <p:nvSpPr>
+          <p:cNvPr id="2" name="Titel 1">
+            <a:extLst>
+              <a:ext uri="{FF2B5EF4-FFF2-40B4-BE49-F238E27FC236}">
+                <a16:creationId xmlns:a16="http://schemas.microsoft.com/office/drawing/2014/main" id="{8E142D88-DDD6-FD10-609B-4D3F6EC6FFD9}"/>
+              </a:ext>
+            </a:extLst>
+          </p:cNvPr>
+          <p:cNvSpPr>
+            <a:spLocks noGrp="1"/>
+          </p:cNvSpPr>
+          <p:nvPr>
+            <p:ph type="title"/>
+          </p:nvPr>
+        </p:nvSpPr>
+        <p:spPr>
+          <a:xfrm>
+            <a:off x="838200" y="365126"/>
+            <a:ext cx="10515600" cy="676866"/>
+          </a:xfrm>
+        </p:spPr>
+        <p:txBody>
+          <a:bodyPr>
+            <a:normAutofit fontScale="90000"/>
+          </a:bodyPr>
+          <a:lstStyle/>
+          <a:p>
+            <a:endParaRPr lang="nl-NL" dirty="0"/>
+          </a:p>
+        </p:txBody>
+      </p:sp>
+      <p:sp>
+        <p:nvSpPr>
+          <p:cNvPr id="3" name="Tijdelijke aanduiding voor inhoud 2">
+            <a:extLst>
+              <a:ext uri="{FF2B5EF4-FFF2-40B4-BE49-F238E27FC236}">
+                <a16:creationId xmlns:a16="http://schemas.microsoft.com/office/drawing/2014/main" id="{B2D4CB9A-A81E-59E9-5293-D8B4040481B7}"/>
+              </a:ext>
+            </a:extLst>
+          </p:cNvPr>
+          <p:cNvSpPr>
+            <a:spLocks noGrp="1"/>
+          </p:cNvSpPr>
+          <p:nvPr>
+            <p:ph idx="1"/>
+          </p:nvPr>
+        </p:nvSpPr>
+        <p:spPr>
+          <a:xfrm>
+            <a:off x="838200" y="1169581"/>
+            <a:ext cx="10515600" cy="5007382"/>
+          </a:xfrm>
+        </p:spPr>
+        <p:txBody>
+          <a:bodyPr/>
+          <a:lstStyle/>
+          <a:p>
+            <a:endParaRPr lang="nl-NL" dirty="0"/>
+          </a:p>
+        </p:txBody>
+      </p:sp>
+    </p:spTree>
+    <p:extLst>
+      <p:ext uri="{BB962C8B-B14F-4D97-AF65-F5344CB8AC3E}">
+        <p14:creationId xmlns:p14="http://schemas.microsoft.com/office/powerpoint/2010/main" val="2180534739"/>
+      </p:ext>
+    </p:extLst>
+  </p:cSld>
+  <p:clrMapOvr>
+    <a:masterClrMapping/>
+  </p:clrMapOvr>
+</p:sld>
+</file>
+
+<file path=ppt/slides/slide12.xml><?xml version="1.0" encoding="utf-8"?>
+<p:sld xmlns:a="http://schemas.openxmlformats.org/drawingml/2006/main" xmlns:r="http://schemas.openxmlformats.org/officeDocument/2006/relationships" xmlns:p="http://schemas.openxmlformats.org/presentationml/2006/main">
+  <p:cSld>
+    <p:spTree>
+      <p:nvGrpSpPr>
+        <p:cNvPr id="1" name="">
+          <a:extLst>
+            <a:ext uri="{FF2B5EF4-FFF2-40B4-BE49-F238E27FC236}">
+              <a16:creationId xmlns:a16="http://schemas.microsoft.com/office/drawing/2014/main" id="{36B1FC50-544B-BDE1-9486-D62639CE599C}"/>
+            </a:ext>
+          </a:extLst>
+        </p:cNvPr>
+        <p:cNvGrpSpPr/>
+        <p:nvPr/>
+      </p:nvGrpSpPr>
+      <p:grpSpPr>
+        <a:xfrm>
+          <a:off x="0" y="0"/>
+          <a:ext cx="0" cy="0"/>
+          <a:chOff x="0" y="0"/>
+          <a:chExt cx="0" cy="0"/>
+        </a:xfrm>
+      </p:grpSpPr>
+      <p:sp>
+        <p:nvSpPr>
+          <p:cNvPr id="2" name="Titel 1">
+            <a:extLst>
+              <a:ext uri="{FF2B5EF4-FFF2-40B4-BE49-F238E27FC236}">
+                <a16:creationId xmlns:a16="http://schemas.microsoft.com/office/drawing/2014/main" id="{C9BF91C3-6D70-41D0-4BEB-49BA47DE5F8C}"/>
+              </a:ext>
+            </a:extLst>
+          </p:cNvPr>
+          <p:cNvSpPr>
+            <a:spLocks noGrp="1"/>
+          </p:cNvSpPr>
+          <p:nvPr>
+            <p:ph type="title"/>
+          </p:nvPr>
+        </p:nvSpPr>
+        <p:spPr>
+          <a:xfrm>
+            <a:off x="838200" y="365126"/>
+            <a:ext cx="10515600" cy="676866"/>
+          </a:xfrm>
+        </p:spPr>
+        <p:txBody>
+          <a:bodyPr>
+            <a:normAutofit fontScale="90000"/>
+          </a:bodyPr>
+          <a:lstStyle/>
+          <a:p>
+            <a:r>
+              <a:rPr lang="nl-NL" dirty="0"/>
+              <a:t>Voorbeeld ongedaan maken</a:t>
+            </a:r>
+          </a:p>
+        </p:txBody>
+      </p:sp>
+      <p:pic>
+        <p:nvPicPr>
+          <p:cNvPr id="6" name="Afbeelding 5">
+            <a:extLst>
+              <a:ext uri="{FF2B5EF4-FFF2-40B4-BE49-F238E27FC236}">
+                <a16:creationId xmlns:a16="http://schemas.microsoft.com/office/drawing/2014/main" id="{F8E92E6D-AB37-3612-705D-D156834D8650}"/>
+              </a:ext>
+            </a:extLst>
+          </p:cNvPr>
+          <p:cNvPicPr>
+            <a:picLocks noChangeAspect="1"/>
+          </p:cNvPicPr>
+          <p:nvPr/>
+        </p:nvPicPr>
+        <p:blipFill>
+          <a:blip r:embed="rId2"/>
+          <a:stretch>
+            <a:fillRect/>
+          </a:stretch>
+        </p:blipFill>
+        <p:spPr>
+          <a:xfrm>
+            <a:off x="0" y="1041992"/>
+            <a:ext cx="17519898" cy="6286074"/>
+          </a:xfrm>
+          <a:prstGeom prst="rect">
+            <a:avLst/>
+          </a:prstGeom>
+        </p:spPr>
+      </p:pic>
+    </p:spTree>
+    <p:extLst>
+      <p:ext uri="{BB962C8B-B14F-4D97-AF65-F5344CB8AC3E}">
+        <p14:creationId xmlns:p14="http://schemas.microsoft.com/office/powerpoint/2010/main" val="506144781"/>
+      </p:ext>
+    </p:extLst>
+  </p:cSld>
+  <p:clrMapOvr>
+    <a:masterClrMapping/>
+  </p:clrMapOvr>
+</p:sld>
+</file>
+
+<file path=ppt/slides/slide13.xml><?xml version="1.0" encoding="utf-8"?>
 <p:sld xmlns:a="http://schemas.openxmlformats.org/drawingml/2006/main" xmlns:r="http://schemas.openxmlformats.org/officeDocument/2006/relationships" xmlns:p="http://schemas.openxmlformats.org/presentationml/2006/main">
   <p:cSld>
     <p:spTree>
@@ -3600,7 +3801,7 @@
 </p:sld>
 </file>
 
-<file path=ppt/slides/slide12.xml><?xml version="1.0" encoding="utf-8"?>
+<file path=ppt/slides/slide14.xml><?xml version="1.0" encoding="utf-8"?>
 <p:sld xmlns:a="http://schemas.openxmlformats.org/drawingml/2006/main" xmlns:r="http://schemas.openxmlformats.org/officeDocument/2006/relationships" xmlns:p="http://schemas.openxmlformats.org/presentationml/2006/main">
   <p:cSld>
     <p:spTree>
@@ -3698,7 +3899,7 @@
 </p:sld>
 </file>
 
-<file path=ppt/slides/slide13.xml><?xml version="1.0" encoding="utf-8"?>
+<file path=ppt/slides/slide15.xml><?xml version="1.0" encoding="utf-8"?>
 <p:sld xmlns:a="http://schemas.openxmlformats.org/drawingml/2006/main" xmlns:r="http://schemas.openxmlformats.org/officeDocument/2006/relationships" xmlns:p="http://schemas.openxmlformats.org/presentationml/2006/main">
   <p:cSld>
     <p:spTree>
@@ -3796,7 +3997,7 @@
 </p:sld>
 </file>
 
-<file path=ppt/slides/slide14.xml><?xml version="1.0" encoding="utf-8"?>
+<file path=ppt/slides/slide16.xml><?xml version="1.0" encoding="utf-8"?>
 <p:sld xmlns:a="http://schemas.openxmlformats.org/drawingml/2006/main" xmlns:r="http://schemas.openxmlformats.org/officeDocument/2006/relationships" xmlns:p="http://schemas.openxmlformats.org/presentationml/2006/main">
   <p:cSld>
     <p:spTree>
@@ -4595,7 +4796,7 @@
         <p:cNvPr id="1" name="">
           <a:extLst>
             <a:ext uri="{FF2B5EF4-FFF2-40B4-BE49-F238E27FC236}">
-              <a16:creationId xmlns:a16="http://schemas.microsoft.com/office/drawing/2014/main" id="{36B1FC50-544B-BDE1-9486-D62639CE599C}"/>
+              <a16:creationId xmlns:a16="http://schemas.microsoft.com/office/drawing/2014/main" id="{75D7C7C8-AB21-888A-3664-FB8C2EFA9D15}"/>
             </a:ext>
           </a:extLst>
         </p:cNvPr>
@@ -4615,7 +4816,7 @@
           <p:cNvPr id="2" name="Titel 1">
             <a:extLst>
               <a:ext uri="{FF2B5EF4-FFF2-40B4-BE49-F238E27FC236}">
-                <a16:creationId xmlns:a16="http://schemas.microsoft.com/office/drawing/2014/main" id="{C9BF91C3-6D70-41D0-4BEB-49BA47DE5F8C}"/>
+                <a16:creationId xmlns:a16="http://schemas.microsoft.com/office/drawing/2014/main" id="{C70C76CB-1605-60C6-8021-F39F2ABE920D}"/>
               </a:ext>
             </a:extLst>
           </p:cNvPr>
@@ -4638,47 +4839,44 @@
           </a:bodyPr>
           <a:lstStyle/>
           <a:p>
-            <a:r>
-              <a:rPr lang="nl-NL" dirty="0"/>
-              <a:t>Voorbeeld ongedaan maken</a:t>
-            </a:r>
-          </a:p>
-        </p:txBody>
-      </p:sp>
-      <p:pic>
-        <p:nvPicPr>
-          <p:cNvPr id="6" name="Afbeelding 5">
-            <a:extLst>
-              <a:ext uri="{FF2B5EF4-FFF2-40B4-BE49-F238E27FC236}">
-                <a16:creationId xmlns:a16="http://schemas.microsoft.com/office/drawing/2014/main" id="{F8E92E6D-AB37-3612-705D-D156834D8650}"/>
-              </a:ext>
-            </a:extLst>
-          </p:cNvPr>
-          <p:cNvPicPr>
-            <a:picLocks noChangeAspect="1"/>
-          </p:cNvPicPr>
-          <p:nvPr/>
-        </p:nvPicPr>
-        <p:blipFill>
-          <a:blip r:embed="rId2"/>
-          <a:stretch>
-            <a:fillRect/>
-          </a:stretch>
-        </p:blipFill>
+            <a:endParaRPr lang="nl-NL" dirty="0"/>
+          </a:p>
+        </p:txBody>
+      </p:sp>
+      <p:sp>
+        <p:nvSpPr>
+          <p:cNvPr id="3" name="Tijdelijke aanduiding voor inhoud 2">
+            <a:extLst>
+              <a:ext uri="{FF2B5EF4-FFF2-40B4-BE49-F238E27FC236}">
+                <a16:creationId xmlns:a16="http://schemas.microsoft.com/office/drawing/2014/main" id="{72FE2A8D-5171-C9A9-B882-E35E4103D3BD}"/>
+              </a:ext>
+            </a:extLst>
+          </p:cNvPr>
+          <p:cNvSpPr>
+            <a:spLocks noGrp="1"/>
+          </p:cNvSpPr>
+          <p:nvPr>
+            <p:ph idx="1"/>
+          </p:nvPr>
+        </p:nvSpPr>
         <p:spPr>
           <a:xfrm>
-            <a:off x="0" y="1041992"/>
-            <a:ext cx="17519898" cy="6286074"/>
-          </a:xfrm>
-          <a:prstGeom prst="rect">
-            <a:avLst/>
-          </a:prstGeom>
-        </p:spPr>
-      </p:pic>
+            <a:off x="838200" y="1169581"/>
+            <a:ext cx="10515600" cy="5007382"/>
+          </a:xfrm>
+        </p:spPr>
+        <p:txBody>
+          <a:bodyPr/>
+          <a:lstStyle/>
+          <a:p>
+            <a:endParaRPr lang="nl-NL" dirty="0"/>
+          </a:p>
+        </p:txBody>
+      </p:sp>
     </p:spTree>
     <p:extLst>
       <p:ext uri="{BB962C8B-B14F-4D97-AF65-F5344CB8AC3E}">
-        <p14:creationId xmlns:p14="http://schemas.microsoft.com/office/powerpoint/2010/main" val="506144781"/>
+        <p14:creationId xmlns:p14="http://schemas.microsoft.com/office/powerpoint/2010/main" val="1991561428"/>
       </p:ext>
     </p:extLst>
   </p:cSld>
